--- a/cursos/recursos/desequilibrios-de-material/09-torre-contra-dos-piezas-menores-ii.pptx
+++ b/cursos/recursos/desequilibrios-de-material/09-torre-contra-dos-piezas-menores-ii.pptx
@@ -3481,7 +3481,7 @@
                 </a:solidFill>
                 <a:latin typeface="Calibri"/>
               </a:rPr>
-              <a:t>Pista: Pensá en una jugada de dama que se centralice, coordinándose con la torre en la última fila.</a:t>
+              <a:t>Pista: Piensa en una jugada de dama que se centralice, coordinándose con la torre en la última fila.</a:t>
             </a:r>
           </a:p>
         </p:txBody>
@@ -3804,7 +3804,7 @@
                 </a:solidFill>
                 <a:latin typeface="Calibri"/>
               </a:rPr>
-              <a:t>Pista: Pensá en llevar la torre a la última fila, atacando al caballo y dejando a las negras sin más recursos que mover peones.</a:t>
+              <a:t>Pista: Piensa en llevar la torre a la última fila, atacando al caballo y dejando a las negras sin más recursos que mover peones.</a:t>
             </a:r>
           </a:p>
         </p:txBody>
@@ -4041,7 +4041,7 @@
                 </a:solidFill>
                 <a:latin typeface="Calibri"/>
               </a:rPr>
-              <a:t>•  Antes de avanzar un peón pasado decisivo, preparalo con calma (como Db2 antes de c6): la prisa puede regalarle al rival la oportunidad de bloquearlo.</a:t>
+              <a:t>•  Antes de avanzar un peón pasado decisivo, prepáralo con calma (como Db2 antes de c6): la prisa puede regalarle al rival la oportunidad de bloquearlo.</a:t>
             </a:r>
           </a:p>
           <a:p>
@@ -4659,7 +4659,7 @@
                 </a:solidFill>
                 <a:latin typeface="Calibri"/>
               </a:rPr>
-              <a:t>Pista: Pensá en un salto de caballo hacia el centro que amenace un doble golpe: capturar en f6 con jaque, o permitir Axd4.</a:t>
+              <a:t>Pista: Piensa en un salto de caballo hacia el centro que amenace un doble golpe: capturar en f6 con jaque, o permitir Axd4.</a:t>
             </a:r>
           </a:p>
         </p:txBody>
@@ -4982,7 +4982,7 @@
                 </a:solidFill>
                 <a:latin typeface="Calibri"/>
               </a:rPr>
-              <a:t>Pista: Pensá en llevar una torre a la sexta fila, atacando un peón y ganando tiempo mientras las piezas negras siguen desconectadas.</a:t>
+              <a:t>Pista: Piensa en llevar una torre a la sexta fila, atacando un peón y ganando tiempo mientras las piezas negras siguen desconectadas.</a:t>
             </a:r>
           </a:p>
         </p:txBody>
@@ -5305,7 +5305,7 @@
                 </a:solidFill>
                 <a:latin typeface="Calibri"/>
               </a:rPr>
-              <a:t>Pista: Pensá en centralizar la segunda torre en la columna del rey, sin apurar ningún avance de peón todavía.</a:t>
+              <a:t>Pista: Piensa en centralizar la segunda torre en la columna del rey, sin apurar ningún avance de peón todavía.</a:t>
             </a:r>
           </a:p>
         </p:txBody>
@@ -5628,7 +5628,7 @@
                 </a:solidFill>
                 <a:latin typeface="Calibri"/>
               </a:rPr>
-              <a:t>Pista: Pensá en avanzar directamente el peón b, apoyado por la torre en a8.</a:t>
+              <a:t>Pista: Piensa en avanzar directamente el peón b, apoyado por la torre en a8.</a:t>
             </a:r>
           </a:p>
         </p:txBody>
@@ -5881,7 +5881,7 @@
                 </a:solidFill>
                 <a:latin typeface="Calibri"/>
               </a:rPr>
-              <a:t>•  Un peón pasado avanzado y bien apoyado por una torre puede volverse imparable: identificá el momento justo para lanzarlo, cuando el rival ya no tenga recursos para bloquearlo con piezas.</a:t>
+              <a:t>•  Un peón pasado avanzado y bien apoyado por una torre puede volverse imparable: identifica el momento justo para lanzarlo, cuando el rival ya no tenga recursos para bloquearlo con piezas.</a:t>
             </a:r>
           </a:p>
         </p:txBody>
@@ -6238,7 +6238,7 @@
                 </a:solidFill>
                 <a:latin typeface="Calibri"/>
               </a:rPr>
-              <a:t>•  No hace falta esperar a estar obligado para entrar en un desequilibrio material: si comprendés bien el tipo de posición resultante, podés buscarlo voluntariamente cuando creas que jugás mejor ese tipo de estructuras.</a:t>
+              <a:t>•  No hace falta esperar a estar obligado para entrar en un desequilibrio material: si comprendes bien el tipo de posición resultante, puedes buscarlo voluntariamente cuando creas que juegas mejor ese tipo de estructuras.</a:t>
             </a:r>
           </a:p>
           <a:p>
@@ -6270,7 +6270,7 @@
                 </a:solidFill>
                 <a:latin typeface="Calibri"/>
               </a:rPr>
-              <a:t>•  Cuando tengas la opción de crear peones pasados conectados en vez de simplificar capturando, priorizá los peones conectados: suelen ser mucho más difíciles de detener para el rival.</a:t>
+              <a:t>•  Cuando tengas la opción de crear peones pasados conectados en vez de simplificar capturando, prioriza los peones conectados: suelen ser mucho más difíciles de detener para el rival.</a:t>
             </a:r>
           </a:p>
         </p:txBody>
@@ -6658,7 +6658,7 @@
                 </a:solidFill>
                 <a:latin typeface="Calibri"/>
               </a:rPr>
-              <a:t>Pista: Pensá en llevar también la segunda torre a la octava fila, en vez de retirarla a una columna central.</a:t>
+              <a:t>Pista: Piensa en llevar también la segunda torre a la octava fila, en vez de retirarla a una columna central.</a:t>
             </a:r>
           </a:p>
         </p:txBody>
@@ -6981,7 +6981,7 @@
                 </a:solidFill>
                 <a:latin typeface="Calibri"/>
               </a:rPr>
-              <a:t>Pista: Pensá en un caballo que se instale en una casilla central avanzada, obligando a las negras a quedarse quietas ante la amenaza de mayores daños.</a:t>
+              <a:t>Pista: Piensa en un caballo que se instale en una casilla central avanzada, obligando a las negras a quedarse quietas ante la amenaza de mayores daños.</a:t>
             </a:r>
           </a:p>
         </p:txBody>
@@ -7304,7 +7304,7 @@
                 </a:solidFill>
                 <a:latin typeface="Calibri"/>
               </a:rPr>
-              <a:t>Pista: Pensá en un salto de caballo, no una captura directa, que conserve la coordinación de las piezas blancas.</a:t>
+              <a:t>Pista: Piensa en un salto de caballo, no una captura directa, que conserve la coordinación de las piezas blancas.</a:t>
             </a:r>
           </a:p>
         </p:txBody>
@@ -7627,7 +7627,7 @@
                 </a:solidFill>
                 <a:latin typeface="Calibri"/>
               </a:rPr>
-              <a:t>Pista: Pensá en avanzar el peón b en vez de capturar en c5.</a:t>
+              <a:t>Pista: Piensa en avanzar el peón b en vez de capturar en c5.</a:t>
             </a:r>
           </a:p>
         </p:txBody>
@@ -7950,7 +7950,7 @@
                 </a:solidFill>
                 <a:latin typeface="Calibri"/>
               </a:rPr>
-              <a:t>Pista: Pensá en centralizar el alfil hacia una casilla clave, controlando la coronación de los peones pasados y la actividad del caballo negro.</a:t>
+              <a:t>Pista: Piensa en centralizar el alfil hacia una casilla clave, controlando la coronación de los peones pasados y la actividad del caballo negro.</a:t>
             </a:r>
           </a:p>
         </p:txBody>
@@ -8171,7 +8171,7 @@
                 </a:solidFill>
                 <a:latin typeface="Calibri"/>
               </a:rPr>
-              <a:t>•  No hace falta esperar a estar obligado para entrar en un desequilibrio material: si comprendés bien el tipo de posición resultante, podés buscarlo voluntariamente cuando creas que jugás mejor ese tipo de estructuras.</a:t>
+              <a:t>•  No hace falta esperar a estar obligado para entrar en un desequilibrio material: si comprendes bien el tipo de posición resultante, puedes buscarlo voluntariamente cuando creas que juegas mejor ese tipo de estructuras.</a:t>
             </a:r>
           </a:p>
           <a:p>
@@ -8203,7 +8203,7 @@
                 </a:solidFill>
                 <a:latin typeface="Calibri"/>
               </a:rPr>
-              <a:t>•  Cuando tengas la opción de crear peones pasados conectados en vez de simplificar capturando, priorizá los peones conectados: suelen ser mucho más difíciles de detener para el rival.</a:t>
+              <a:t>•  Cuando tengas la opción de crear peones pasados conectados en vez de simplificar capturando, prioriza los peones conectados: suelen ser mucho más difíciles de detener para el rival.</a:t>
             </a:r>
           </a:p>
         </p:txBody>
@@ -8346,7 +8346,7 @@
                 </a:solidFill>
                 <a:latin typeface="Calibri"/>
               </a:rPr>
-              <a:t>Jugá la posición de Mareco–Flores contra el motor con el bando de la torre, poniendo atención especial en si tus peones de más pueden avanzar libremente o quedan bloqueados. Después estudiá la decisión voluntaria de Kramnik en Kramnik–Vocaturo y escribí, en tus propias palabras, qué factores (más allá del material) justificaban esa elección.</a:t>
+              <a:t>Juega la posición de Mareco–Flores contra el motor con el bando de la torre, poniendo atención especial en si tus peones de más pueden avanzar libremente o quedan bloqueados. Después estudia la decisión voluntaria de Kramnik en Kramnik–Vocaturo y escribe, en tus propias palabras, qué factores (más allá del material) justificaban esa elección.</a:t>
             </a:r>
           </a:p>
           <a:p>
@@ -8378,7 +8378,7 @@
                 </a:solidFill>
                 <a:latin typeface="Calibri"/>
               </a:rPr>
-              <a:t>En la página del curso podés recorrer cada partida con los comentarios, adivinar las jugadas clave en el tablero y continuar cualquier posición contra el motor (Stockfish). La hoja de ejercicios en PDF reúne los momentos clave de esta lección para resolver sin tablero.</a:t>
+              <a:t>En la página del curso puedes recorrer cada partida con los comentarios, adivinar las jugadas clave en el tablero y continuar cualquier posición contra el motor (Stockfish). La hoja de ejercicios en PDF reúne los momentos clave de esta lección para resolver sin tablero.</a:t>
             </a:r>
           </a:p>
         </p:txBody>
@@ -8417,7 +8417,7 @@
                 </a:solidFill>
                 <a:latin typeface="Calibri"/>
               </a:rPr>
-              <a:t>•  Primero recorré la partida completa leyendo los comentarios.</a:t>
+              <a:t>•  Primero recorre la partida completa leyendo los comentarios.</a:t>
             </a:r>
           </a:p>
           <a:p>
@@ -8433,7 +8433,7 @@
                 </a:solidFill>
                 <a:latin typeface="Calibri"/>
               </a:rPr>
-              <a:t>•  Después hacé el modo "adivinar las jugadas clave" hasta acertar todas.</a:t>
+              <a:t>•  Después haz el modo "adivinar las jugadas clave" hasta acertar todas.</a:t>
             </a:r>
           </a:p>
           <a:p>
@@ -8449,7 +8449,7 @@
                 </a:solidFill>
                 <a:latin typeface="Calibri"/>
               </a:rPr>
-              <a:t>•  Por último respondé el cuestionario y anotá con tus palabras las reglas de la lección.</a:t>
+              <a:t>•  Por último responde el cuestionario y anota con tus palabras las reglas de la lección.</a:t>
             </a:r>
           </a:p>
         </p:txBody>
@@ -9053,7 +9053,7 @@
                 </a:solidFill>
                 <a:latin typeface="Calibri"/>
               </a:rPr>
-              <a:t>•  No evalúes este desequilibrio contando sólo piezas y peones: mirá estabilidad, pasados y planes disponibles.</a:t>
+              <a:t>•  No evalúes este desequilibrio contando sólo piezas y peones: mira estabilidad, pasados y planes disponibles.</a:t>
             </a:r>
           </a:p>
           <a:p>
@@ -9085,7 +9085,7 @@
                 </a:solidFill>
                 <a:latin typeface="Calibri"/>
               </a:rPr>
-              <a:t>•  Con las piezas menores, buscá el ataque al rey y el avance de los peones pasados propios.</a:t>
+              <a:t>•  Con las piezas menores, busca el ataque al rey y el avance de los peones pasados propios.</a:t>
             </a:r>
           </a:p>
           <a:p>
@@ -9101,7 +9101,7 @@
                 </a:solidFill>
                 <a:latin typeface="Calibri"/>
               </a:rPr>
-              <a:t>•  Con la torre, buscá simplificar y cazar los peones débiles rivales: menos piezas favorecen tu velocidad.</a:t>
+              <a:t>•  Con la torre, busca simplificar y cazar los peones débiles rivales: menos piezas favorecen tu velocidad.</a:t>
             </a:r>
           </a:p>
           <a:p>
@@ -9117,7 +9117,7 @@
                 </a:solidFill>
                 <a:latin typeface="Calibri"/>
               </a:rPr>
-              <a:t>•  Antes de sacrificar la calidad, asegurate de que la posición resultante sea estable y no vayas a perder más material.</a:t>
+              <a:t>•  Antes de sacrificar la calidad, asegúrate de que la posición resultante sea estable y no vayas a perder más material.</a:t>
             </a:r>
           </a:p>
         </p:txBody>
@@ -9719,7 +9719,7 @@
                 </a:solidFill>
                 <a:latin typeface="Calibri"/>
               </a:rPr>
-              <a:t>Pista: Pensá en una jugada de dama hacia una casilla flexible del flanco de dama, preparando Db8+ más adelante.</a:t>
+              <a:t>Pista: Piensa en una jugada de dama hacia una casilla flexible del flanco de dama, preparando Db8+ más adelante.</a:t>
             </a:r>
           </a:p>
         </p:txBody>
